--- a/Cover.pptx
+++ b/Cover.pptx
@@ -243,7 +243,7 @@
           <a:p>
             <a:fld id="{EA20A0A1-F4DB-4467-9601-E7157717FD2A}" type="datetimeFigureOut">
               <a:rPr lang="en-US" smtClean="0"/>
-              <a:t>06-Aug-25</a:t>
+              <a:t>19-Nov-25</a:t>
             </a:fld>
             <a:endParaRPr lang="en-US"/>
           </a:p>
@@ -413,7 +413,7 @@
           <a:p>
             <a:fld id="{EA20A0A1-F4DB-4467-9601-E7157717FD2A}" type="datetimeFigureOut">
               <a:rPr lang="en-US" smtClean="0"/>
-              <a:t>06-Aug-25</a:t>
+              <a:t>19-Nov-25</a:t>
             </a:fld>
             <a:endParaRPr lang="en-US"/>
           </a:p>
@@ -593,7 +593,7 @@
           <a:p>
             <a:fld id="{EA20A0A1-F4DB-4467-9601-E7157717FD2A}" type="datetimeFigureOut">
               <a:rPr lang="en-US" smtClean="0"/>
-              <a:t>06-Aug-25</a:t>
+              <a:t>19-Nov-25</a:t>
             </a:fld>
             <a:endParaRPr lang="en-US"/>
           </a:p>
@@ -763,7 +763,7 @@
           <a:p>
             <a:fld id="{EA20A0A1-F4DB-4467-9601-E7157717FD2A}" type="datetimeFigureOut">
               <a:rPr lang="en-US" smtClean="0"/>
-              <a:t>06-Aug-25</a:t>
+              <a:t>19-Nov-25</a:t>
             </a:fld>
             <a:endParaRPr lang="en-US"/>
           </a:p>
@@ -1007,7 +1007,7 @@
           <a:p>
             <a:fld id="{EA20A0A1-F4DB-4467-9601-E7157717FD2A}" type="datetimeFigureOut">
               <a:rPr lang="en-US" smtClean="0"/>
-              <a:t>06-Aug-25</a:t>
+              <a:t>19-Nov-25</a:t>
             </a:fld>
             <a:endParaRPr lang="en-US"/>
           </a:p>
@@ -1239,7 +1239,7 @@
           <a:p>
             <a:fld id="{EA20A0A1-F4DB-4467-9601-E7157717FD2A}" type="datetimeFigureOut">
               <a:rPr lang="en-US" smtClean="0"/>
-              <a:t>06-Aug-25</a:t>
+              <a:t>19-Nov-25</a:t>
             </a:fld>
             <a:endParaRPr lang="en-US"/>
           </a:p>
@@ -1606,7 +1606,7 @@
           <a:p>
             <a:fld id="{EA20A0A1-F4DB-4467-9601-E7157717FD2A}" type="datetimeFigureOut">
               <a:rPr lang="en-US" smtClean="0"/>
-              <a:t>06-Aug-25</a:t>
+              <a:t>19-Nov-25</a:t>
             </a:fld>
             <a:endParaRPr lang="en-US"/>
           </a:p>
@@ -1724,7 +1724,7 @@
           <a:p>
             <a:fld id="{EA20A0A1-F4DB-4467-9601-E7157717FD2A}" type="datetimeFigureOut">
               <a:rPr lang="en-US" smtClean="0"/>
-              <a:t>06-Aug-25</a:t>
+              <a:t>19-Nov-25</a:t>
             </a:fld>
             <a:endParaRPr lang="en-US"/>
           </a:p>
@@ -1819,7 +1819,7 @@
           <a:p>
             <a:fld id="{EA20A0A1-F4DB-4467-9601-E7157717FD2A}" type="datetimeFigureOut">
               <a:rPr lang="en-US" smtClean="0"/>
-              <a:t>06-Aug-25</a:t>
+              <a:t>19-Nov-25</a:t>
             </a:fld>
             <a:endParaRPr lang="en-US"/>
           </a:p>
@@ -2096,7 +2096,7 @@
           <a:p>
             <a:fld id="{EA20A0A1-F4DB-4467-9601-E7157717FD2A}" type="datetimeFigureOut">
               <a:rPr lang="en-US" smtClean="0"/>
-              <a:t>06-Aug-25</a:t>
+              <a:t>19-Nov-25</a:t>
             </a:fld>
             <a:endParaRPr lang="en-US"/>
           </a:p>
@@ -2353,7 +2353,7 @@
           <a:p>
             <a:fld id="{EA20A0A1-F4DB-4467-9601-E7157717FD2A}" type="datetimeFigureOut">
               <a:rPr lang="en-US" smtClean="0"/>
-              <a:t>06-Aug-25</a:t>
+              <a:t>19-Nov-25</a:t>
             </a:fld>
             <a:endParaRPr lang="en-US"/>
           </a:p>
@@ -2566,7 +2566,7 @@
           <a:p>
             <a:fld id="{EA20A0A1-F4DB-4467-9601-E7157717FD2A}" type="datetimeFigureOut">
               <a:rPr lang="en-US" smtClean="0"/>
-              <a:t>06-Aug-25</a:t>
+              <a:t>19-Nov-25</a:t>
             </a:fld>
             <a:endParaRPr lang="en-US"/>
           </a:p>
@@ -2979,8 +2979,8 @@
         </p:nvSpPr>
         <p:spPr>
           <a:xfrm>
-            <a:off x="0" y="0"/>
-            <a:ext cx="6858000" cy="9906000"/>
+            <a:off x="0" y="39026"/>
+            <a:ext cx="5767754" cy="8331200"/>
           </a:xfrm>
           <a:prstGeom prst="rect">
             <a:avLst/>
@@ -3019,8 +3019,8 @@
         </p:nvSpPr>
         <p:spPr>
           <a:xfrm>
-            <a:off x="0" y="1283050"/>
-            <a:ext cx="6858000" cy="584775"/>
+            <a:off x="0" y="990951"/>
+            <a:ext cx="5767749" cy="584775"/>
           </a:xfrm>
           <a:prstGeom prst="rect">
             <a:avLst/>
@@ -3086,8 +3086,8 @@
         </p:nvSpPr>
         <p:spPr>
           <a:xfrm>
-            <a:off x="-2670" y="7561620"/>
-            <a:ext cx="6553200" cy="1292662"/>
+            <a:off x="-9962" y="6754055"/>
+            <a:ext cx="5511413" cy="1292662"/>
           </a:xfrm>
           <a:prstGeom prst="rect">
             <a:avLst/>
@@ -3173,8 +3173,8 @@
         </p:blipFill>
         <p:spPr>
           <a:xfrm>
-            <a:off x="-9963" y="2334768"/>
-            <a:ext cx="6870633" cy="5226852"/>
+            <a:off x="-9962" y="2032210"/>
+            <a:ext cx="5778378" cy="4395916"/>
           </a:xfrm>
           <a:prstGeom prst="rect">
             <a:avLst/>
